--- a/Презентация/Презентация.pptx
+++ b/Презентация/Презентация.pptx
@@ -5,10 +5,10 @@
     <p:sldMasterId id="2147483852" r:id="rId1"/>
   </p:sldMasterIdLst>
   <p:notesMasterIdLst>
-    <p:notesMasterId r:id="rId19"/>
+    <p:notesMasterId r:id="rId18"/>
   </p:notesMasterIdLst>
   <p:handoutMasterIdLst>
-    <p:handoutMasterId r:id="rId20"/>
+    <p:handoutMasterId r:id="rId19"/>
   </p:handoutMasterIdLst>
   <p:sldIdLst>
     <p:sldId id="265" r:id="rId2"/>
@@ -26,8 +26,7 @@
     <p:sldId id="650" r:id="rId14"/>
     <p:sldId id="651" r:id="rId15"/>
     <p:sldId id="655" r:id="rId16"/>
-    <p:sldId id="656" r:id="rId17"/>
-    <p:sldId id="284" r:id="rId18"/>
+    <p:sldId id="284" r:id="rId17"/>
   </p:sldIdLst>
   <p:sldSz cx="12192000" cy="6858000"/>
   <p:notesSz cx="7099300" cy="10234613"/>
@@ -1011,7 +1010,7 @@
                   <a:spcPct val="0"/>
                 </a:spcAft>
               </a:pPr>
-              <a:t>17</a:t>
+              <a:t>16</a:t>
             </a:fld>
             <a:endParaRPr lang="ru-RU"/>
           </a:p>
@@ -7911,7 +7910,91 @@
       </p:grpSpPr>
       <p:sp>
         <p:nvSpPr>
-          <p:cNvPr id="3" name="TextBox 2"/>
+          <p:cNvPr id="5" name="Прямоугольник 4"/>
+          <p:cNvSpPr/>
+          <p:nvPr/>
+        </p:nvSpPr>
+        <p:spPr>
+          <a:xfrm>
+            <a:off x="0" y="188640"/>
+            <a:ext cx="9462539" cy="430887"/>
+          </a:xfrm>
+          <a:prstGeom prst="rect">
+            <a:avLst/>
+          </a:prstGeom>
+        </p:spPr>
+        <p:txBody>
+          <a:bodyPr wrap="square">
+            <a:spAutoFit/>
+          </a:bodyPr>
+          <a:lstStyle/>
+          <a:p>
+            <a:pPr lvl="0" eaLnBrk="0" hangingPunct="0">
+              <a:lnSpc>
+                <a:spcPct val="110000"/>
+              </a:lnSpc>
+              <a:defRPr/>
+            </a:pPr>
+            <a:r>
+              <a:rPr lang="ru-RU" sz="2000" b="1" cap="all" dirty="0">
+                <a:solidFill>
+                  <a:prstClr val="white"/>
+                </a:solidFill>
+                <a:latin typeface="Arial Narrow"/>
+              </a:rPr>
+              <a:t>ПРЕДЛАГАЕМАЯ КОНЦЕПЦИЯ МОДЕЛИ </a:t>
+            </a:r>
+            <a:r>
+              <a:rPr lang="ru-RU" sz="2000" b="1" cap="all" dirty="0" smtClean="0">
+                <a:solidFill>
+                  <a:prstClr val="white"/>
+                </a:solidFill>
+                <a:latin typeface="Arial Narrow"/>
+              </a:rPr>
+              <a:t>УСТРОЙСТВА ДЛЯ ДАЛЬНЕЙШЕЙ РАЗРАБОТКИ</a:t>
+            </a:r>
+            <a:endParaRPr lang="en-US" sz="2000" b="1" cap="all" dirty="0">
+              <a:solidFill>
+                <a:prstClr val="white"/>
+              </a:solidFill>
+              <a:latin typeface="Arial Narrow"/>
+            </a:endParaRPr>
+          </a:p>
+        </p:txBody>
+      </p:sp>
+      <p:pic>
+        <p:nvPicPr>
+          <p:cNvPr id="6" name="Рисунок 5"/>
+          <p:cNvPicPr>
+            <a:picLocks noChangeAspect="1"/>
+          </p:cNvPicPr>
+          <p:nvPr/>
+        </p:nvPicPr>
+        <p:blipFill>
+          <a:blip r:embed="rId2">
+            <a:extLst>
+              <a:ext uri="{28A0092B-C50C-407E-A947-70E740481C1C}">
+                <a14:useLocalDpi xmlns:a14="http://schemas.microsoft.com/office/drawing/2010/main" val="0"/>
+              </a:ext>
+            </a:extLst>
+          </a:blip>
+          <a:stretch>
+            <a:fillRect/>
+          </a:stretch>
+        </p:blipFill>
+        <p:spPr>
+          <a:xfrm>
+            <a:off x="5519936" y="1340503"/>
+            <a:ext cx="6606044" cy="5164221"/>
+          </a:xfrm>
+          <a:prstGeom prst="rect">
+            <a:avLst/>
+          </a:prstGeom>
+        </p:spPr>
+      </p:pic>
+      <p:sp>
+        <p:nvSpPr>
+          <p:cNvPr id="7" name="TextBox 6"/>
           <p:cNvSpPr txBox="1"/>
           <p:nvPr/>
         </p:nvSpPr>
@@ -7945,7 +8028,7 @@
                 </a:solidFill>
                 <a:latin typeface="+mn-lt"/>
               </a:rPr>
-              <a:t>Требуемые данные для формирования эксплуатационной документации </a:t>
+              <a:t>Укрупненная диаграмма классов для разработки ПО </a:t>
             </a:r>
             <a:r>
               <a:rPr lang="en-US" sz="2400" b="1" u="sng" dirty="0" smtClean="0">
@@ -7971,14 +8054,14 @@
       </p:sp>
       <p:sp>
         <p:nvSpPr>
-          <p:cNvPr id="4" name="TextBox 3"/>
+          <p:cNvPr id="8" name="TextBox 7"/>
           <p:cNvSpPr txBox="1"/>
           <p:nvPr/>
         </p:nvSpPr>
         <p:spPr>
           <a:xfrm>
-            <a:off x="767408" y="1430378"/>
-            <a:ext cx="11017224" cy="723275"/>
+            <a:off x="199356" y="1340503"/>
+            <a:ext cx="5171195" cy="5663089"/>
           </a:xfrm>
           <a:prstGeom prst="rect">
             <a:avLst/>
@@ -8005,8 +8088,492 @@
                 </a:solidFill>
                 <a:latin typeface="+mn-lt"/>
               </a:rPr>
-              <a:t>Код заказа – формирование отчета по железу</a:t>
-            </a:r>
+              <a:t>Для описания устройства достаточно собрать объект классов </a:t>
+            </a:r>
+            <a:r>
+              <a:rPr lang="ru-RU" b="1" dirty="0" smtClean="0">
+                <a:solidFill>
+                  <a:schemeClr val="tx2">
+                    <a:lumMod val="75000"/>
+                  </a:schemeClr>
+                </a:solidFill>
+                <a:latin typeface="+mn-lt"/>
+              </a:rPr>
+              <a:t>Аппаратная часть и Программная часть.</a:t>
+            </a:r>
+          </a:p>
+          <a:p>
+            <a:pPr>
+              <a:spcAft>
+                <a:spcPts val="600"/>
+              </a:spcAft>
+            </a:pPr>
+            <a:r>
+              <a:rPr lang="ru-RU" b="1" dirty="0" smtClean="0">
+                <a:solidFill>
+                  <a:schemeClr val="tx2">
+                    <a:lumMod val="75000"/>
+                  </a:schemeClr>
+                </a:solidFill>
+                <a:latin typeface="+mn-lt"/>
+              </a:rPr>
+              <a:t>То есть, фактически необходим только КОД ЗАКАЗА устройства</a:t>
+            </a:r>
+            <a:r>
+              <a:rPr lang="en-US" b="1" dirty="0" smtClean="0">
+                <a:solidFill>
+                  <a:schemeClr val="tx2">
+                    <a:lumMod val="75000"/>
+                  </a:schemeClr>
+                </a:solidFill>
+                <a:latin typeface="+mn-lt"/>
+              </a:rPr>
+              <a:t> (</a:t>
+            </a:r>
+            <a:r>
+              <a:rPr lang="ru-RU" b="1" dirty="0" smtClean="0">
+                <a:solidFill>
+                  <a:schemeClr val="tx2">
+                    <a:lumMod val="75000"/>
+                  </a:schemeClr>
+                </a:solidFill>
+                <a:latin typeface="+mn-lt"/>
+              </a:rPr>
+              <a:t>и, естественно, заполненная база данных с инфо по модулям и функциональным блокам</a:t>
+            </a:r>
+            <a:r>
+              <a:rPr lang="en-US" b="1" dirty="0" smtClean="0">
+                <a:solidFill>
+                  <a:schemeClr val="tx2">
+                    <a:lumMod val="75000"/>
+                  </a:schemeClr>
+                </a:solidFill>
+                <a:latin typeface="+mn-lt"/>
+              </a:rPr>
+              <a:t>)</a:t>
+            </a:r>
+            <a:r>
+              <a:rPr lang="ru-RU" b="1" dirty="0" smtClean="0">
+                <a:solidFill>
+                  <a:schemeClr val="tx2">
+                    <a:lumMod val="75000"/>
+                  </a:schemeClr>
+                </a:solidFill>
+                <a:latin typeface="+mn-lt"/>
+              </a:rPr>
+              <a:t>.</a:t>
+            </a:r>
+          </a:p>
+          <a:p>
+            <a:pPr>
+              <a:spcAft>
+                <a:spcPts val="600"/>
+              </a:spcAft>
+            </a:pPr>
+            <a:r>
+              <a:rPr lang="ru-RU" b="1" dirty="0">
+                <a:solidFill>
+                  <a:schemeClr val="tx2">
+                    <a:lumMod val="75000"/>
+                  </a:schemeClr>
+                </a:solidFill>
+                <a:latin typeface="+mn-lt"/>
+              </a:rPr>
+              <a:t>Например</a:t>
+            </a:r>
+            <a:r>
+              <a:rPr lang="ru-RU" b="1" dirty="0">
+                <a:solidFill>
+                  <a:schemeClr val="tx2">
+                    <a:lumMod val="75000"/>
+                  </a:schemeClr>
+                </a:solidFill>
+                <a:latin typeface="+mn-lt"/>
+              </a:rPr>
+              <a:t>, вида</a:t>
+            </a:r>
+            <a:r>
+              <a:rPr lang="en-US" b="1" dirty="0">
+                <a:solidFill>
+                  <a:schemeClr val="tx2">
+                    <a:lumMod val="75000"/>
+                  </a:schemeClr>
+                </a:solidFill>
+                <a:latin typeface="+mn-lt"/>
+              </a:rPr>
+              <a:t>:</a:t>
+            </a:r>
+          </a:p>
+          <a:p>
+            <a:pPr>
+              <a:spcAft>
+                <a:spcPts val="600"/>
+              </a:spcAft>
+            </a:pPr>
+            <a:r>
+              <a:rPr lang="ru-RU" b="1" dirty="0">
+                <a:solidFill>
+                  <a:schemeClr val="tx2">
+                    <a:lumMod val="75000"/>
+                  </a:schemeClr>
+                </a:solidFill>
+                <a:latin typeface="+mn-lt"/>
+              </a:rPr>
+              <a:t>ЮНИТ-М314-ДЗТ2-Р02с-</a:t>
+            </a:r>
+            <a:r>
+              <a:rPr lang="en-US" b="1" dirty="0">
+                <a:solidFill>
+                  <a:schemeClr val="tx2">
+                    <a:lumMod val="75000"/>
+                  </a:schemeClr>
+                </a:solidFill>
+                <a:latin typeface="+mn-lt"/>
+              </a:rPr>
+              <a:t>x-K002-</a:t>
+            </a:r>
+            <a:r>
+              <a:rPr lang="ru-RU" b="1" dirty="0">
+                <a:solidFill>
+                  <a:schemeClr val="tx2">
+                    <a:lumMod val="75000"/>
+                  </a:schemeClr>
+                </a:solidFill>
+                <a:latin typeface="+mn-lt"/>
+              </a:rPr>
+              <a:t>х</a:t>
+            </a:r>
+            <a:r>
+              <a:rPr lang="en-US" b="1" dirty="0">
+                <a:solidFill>
+                  <a:schemeClr val="tx2">
+                    <a:lumMod val="75000"/>
+                  </a:schemeClr>
+                </a:solidFill>
+                <a:latin typeface="+mn-lt"/>
+              </a:rPr>
+              <a:t>-B021-B0</a:t>
+            </a:r>
+            <a:r>
+              <a:rPr lang="ru-RU" b="1" dirty="0">
+                <a:solidFill>
+                  <a:schemeClr val="tx2">
+                    <a:lumMod val="75000"/>
+                  </a:schemeClr>
+                </a:solidFill>
+                <a:latin typeface="+mn-lt"/>
+              </a:rPr>
+              <a:t>0</a:t>
+            </a:r>
+            <a:r>
+              <a:rPr lang="en-US" b="1" dirty="0">
+                <a:solidFill>
+                  <a:schemeClr val="tx2">
+                    <a:lumMod val="75000"/>
+                  </a:schemeClr>
+                </a:solidFill>
+                <a:latin typeface="+mn-lt"/>
+              </a:rPr>
+              <a:t>1-</a:t>
+            </a:r>
+            <a:r>
+              <a:rPr lang="ru-RU" b="1" dirty="0">
+                <a:solidFill>
+                  <a:schemeClr val="tx2">
+                    <a:lumMod val="75000"/>
+                  </a:schemeClr>
+                </a:solidFill>
+                <a:latin typeface="+mn-lt"/>
+              </a:rPr>
+              <a:t>х</a:t>
+            </a:r>
+            <a:r>
+              <a:rPr lang="en-US" b="1" dirty="0">
+                <a:solidFill>
+                  <a:schemeClr val="tx2">
+                    <a:lumMod val="75000"/>
+                  </a:schemeClr>
+                </a:solidFill>
+                <a:latin typeface="+mn-lt"/>
+              </a:rPr>
+              <a:t>-</a:t>
+            </a:r>
+            <a:r>
+              <a:rPr lang="ru-RU" b="1" dirty="0">
+                <a:solidFill>
+                  <a:schemeClr val="tx2">
+                    <a:lumMod val="75000"/>
+                  </a:schemeClr>
+                </a:solidFill>
+                <a:latin typeface="+mn-lt"/>
+              </a:rPr>
+              <a:t>М090.</a:t>
+            </a:r>
+            <a:r>
+              <a:rPr lang="en-US" b="1" dirty="0">
+                <a:solidFill>
+                  <a:schemeClr val="tx2">
+                    <a:lumMod val="75000"/>
+                  </a:schemeClr>
+                </a:solidFill>
+                <a:latin typeface="+mn-lt"/>
+              </a:rPr>
+              <a:t>ab00-</a:t>
+            </a:r>
+            <a:r>
+              <a:rPr lang="ru-RU" b="1" dirty="0">
+                <a:solidFill>
+                  <a:schemeClr val="tx2">
+                    <a:lumMod val="75000"/>
+                  </a:schemeClr>
+                </a:solidFill>
+                <a:latin typeface="+mn-lt"/>
+              </a:rPr>
+              <a:t>х-С01.</a:t>
+            </a:r>
+            <a:r>
+              <a:rPr lang="en-US" b="1" dirty="0">
+                <a:solidFill>
+                  <a:schemeClr val="tx2">
+                    <a:lumMod val="75000"/>
+                  </a:schemeClr>
+                </a:solidFill>
+                <a:latin typeface="+mn-lt"/>
+              </a:rPr>
+              <a:t>a0</a:t>
+            </a:r>
+            <a:r>
+              <a:rPr lang="ru-RU" b="1" dirty="0">
+                <a:solidFill>
+                  <a:schemeClr val="tx2">
+                    <a:lumMod val="75000"/>
+                  </a:schemeClr>
+                </a:solidFill>
+                <a:latin typeface="+mn-lt"/>
+              </a:rPr>
+              <a:t>-2.1</a:t>
+            </a:r>
+          </a:p>
+          <a:p>
+            <a:pPr marL="0" indent="0">
+              <a:buNone/>
+            </a:pPr>
+            <a:r>
+              <a:rPr lang="ru-RU" b="1" dirty="0">
+                <a:solidFill>
+                  <a:schemeClr val="tx2">
+                    <a:lumMod val="75000"/>
+                  </a:schemeClr>
+                </a:solidFill>
+                <a:latin typeface="+mn-lt"/>
+              </a:rPr>
+              <a:t>Из этого кода заказа получаем список модулей </a:t>
+            </a:r>
+            <a:r>
+              <a:rPr lang="en-US" b="1" dirty="0">
+                <a:solidFill>
+                  <a:schemeClr val="tx2">
+                    <a:lumMod val="75000"/>
+                  </a:schemeClr>
+                </a:solidFill>
+                <a:latin typeface="+mn-lt"/>
+              </a:rPr>
+              <a:t>[‘</a:t>
+            </a:r>
+            <a:r>
+              <a:rPr lang="ru-RU" b="1" dirty="0">
+                <a:solidFill>
+                  <a:schemeClr val="tx2">
+                    <a:lumMod val="75000"/>
+                  </a:schemeClr>
+                </a:solidFill>
+                <a:latin typeface="+mn-lt"/>
+              </a:rPr>
+              <a:t>Р02с</a:t>
+            </a:r>
+            <a:r>
+              <a:rPr lang="en-US" b="1" dirty="0">
+                <a:solidFill>
+                  <a:schemeClr val="tx2">
+                    <a:lumMod val="75000"/>
+                  </a:schemeClr>
+                </a:solidFill>
+                <a:latin typeface="+mn-lt"/>
+              </a:rPr>
+              <a:t>’, ‘K002’, ‘B021’, ‘</a:t>
+            </a:r>
+            <a:r>
+              <a:rPr lang="ru-RU" b="1" dirty="0">
+                <a:solidFill>
+                  <a:schemeClr val="tx2">
+                    <a:lumMod val="75000"/>
+                  </a:schemeClr>
+                </a:solidFill>
+                <a:latin typeface="+mn-lt"/>
+              </a:rPr>
+              <a:t>В001</a:t>
+            </a:r>
+            <a:r>
+              <a:rPr lang="en-US" b="1" dirty="0">
+                <a:solidFill>
+                  <a:schemeClr val="tx2">
+                    <a:lumMod val="75000"/>
+                  </a:schemeClr>
+                </a:solidFill>
+                <a:latin typeface="+mn-lt"/>
+              </a:rPr>
+              <a:t>’, ‘</a:t>
+            </a:r>
+            <a:r>
+              <a:rPr lang="ru-RU" b="1" dirty="0">
+                <a:solidFill>
+                  <a:schemeClr val="tx2">
+                    <a:lumMod val="75000"/>
+                  </a:schemeClr>
+                </a:solidFill>
+                <a:latin typeface="+mn-lt"/>
+              </a:rPr>
+              <a:t>М090.</a:t>
+            </a:r>
+            <a:r>
+              <a:rPr lang="en-US" b="1" dirty="0">
+                <a:solidFill>
+                  <a:schemeClr val="tx2">
+                    <a:lumMod val="75000"/>
+                  </a:schemeClr>
+                </a:solidFill>
+                <a:latin typeface="+mn-lt"/>
+              </a:rPr>
+              <a:t>ab00-’, ‘</a:t>
+            </a:r>
+            <a:r>
+              <a:rPr lang="ru-RU" b="1" dirty="0">
+                <a:solidFill>
+                  <a:schemeClr val="tx2">
+                    <a:lumMod val="75000"/>
+                  </a:schemeClr>
+                </a:solidFill>
+                <a:latin typeface="+mn-lt"/>
+              </a:rPr>
+              <a:t>С01.</a:t>
+            </a:r>
+            <a:r>
+              <a:rPr lang="en-US" b="1" dirty="0">
+                <a:solidFill>
+                  <a:schemeClr val="tx2">
+                    <a:lumMod val="75000"/>
+                  </a:schemeClr>
+                </a:solidFill>
+                <a:latin typeface="+mn-lt"/>
+              </a:rPr>
+              <a:t>a0’] </a:t>
+            </a:r>
+            <a:r>
+              <a:rPr lang="ru-RU" b="1" dirty="0">
+                <a:solidFill>
+                  <a:schemeClr val="tx2">
+                    <a:lumMod val="75000"/>
+                  </a:schemeClr>
+                </a:solidFill>
+                <a:latin typeface="+mn-lt"/>
+              </a:rPr>
+              <a:t>для описания аппаратной части и </a:t>
+            </a:r>
+          </a:p>
+          <a:p>
+            <a:pPr marL="0" indent="0">
+              <a:buNone/>
+            </a:pPr>
+            <a:r>
+              <a:rPr lang="ru-RU" b="1" dirty="0">
+                <a:solidFill>
+                  <a:schemeClr val="tx2">
+                    <a:lumMod val="75000"/>
+                  </a:schemeClr>
+                </a:solidFill>
+                <a:latin typeface="+mn-lt"/>
+              </a:rPr>
+              <a:t>получаем версию ФСУ </a:t>
+            </a:r>
+            <a:r>
+              <a:rPr lang="en-US" b="1" dirty="0">
+                <a:solidFill>
+                  <a:schemeClr val="tx2">
+                    <a:lumMod val="75000"/>
+                  </a:schemeClr>
+                </a:solidFill>
+                <a:latin typeface="+mn-lt"/>
+              </a:rPr>
+              <a:t>‘</a:t>
+            </a:r>
+            <a:r>
+              <a:rPr lang="ru-RU" b="1" dirty="0">
+                <a:solidFill>
+                  <a:schemeClr val="tx2">
+                    <a:lumMod val="75000"/>
+                  </a:schemeClr>
+                </a:solidFill>
+                <a:latin typeface="+mn-lt"/>
+              </a:rPr>
+              <a:t>ДЗТ2-2.1</a:t>
+            </a:r>
+            <a:r>
+              <a:rPr lang="en-US" b="1" dirty="0">
+                <a:solidFill>
+                  <a:schemeClr val="tx2">
+                    <a:lumMod val="75000"/>
+                  </a:schemeClr>
+                </a:solidFill>
+                <a:latin typeface="+mn-lt"/>
+              </a:rPr>
+              <a:t>’</a:t>
+            </a:r>
+            <a:r>
+              <a:rPr lang="ru-RU" b="1" dirty="0">
+                <a:solidFill>
+                  <a:schemeClr val="tx2">
+                    <a:lumMod val="75000"/>
+                  </a:schemeClr>
+                </a:solidFill>
+                <a:latin typeface="+mn-lt"/>
+              </a:rPr>
+              <a:t>, зная версию ФСУ из БД мы получим ее функциональный состав. И все … </a:t>
+            </a:r>
+            <a:r>
+              <a:rPr lang="ru-RU" b="1" dirty="0" err="1">
+                <a:solidFill>
+                  <a:schemeClr val="tx2">
+                    <a:lumMod val="75000"/>
+                  </a:schemeClr>
+                </a:solidFill>
+                <a:latin typeface="+mn-lt"/>
+              </a:rPr>
+              <a:t>вуаля</a:t>
+            </a:r>
+            <a:r>
+              <a:rPr lang="ru-RU" b="1" dirty="0">
+                <a:solidFill>
+                  <a:schemeClr val="tx2">
+                    <a:lumMod val="75000"/>
+                  </a:schemeClr>
+                </a:solidFill>
+                <a:latin typeface="+mn-lt"/>
+              </a:rPr>
+              <a:t>! Можем создать объект Устройство и передать его в класс Руководство по эксплуатации. </a:t>
+            </a:r>
+          </a:p>
+          <a:p>
+            <a:pPr marL="0" indent="0">
+              <a:buNone/>
+            </a:pPr>
+            <a:endParaRPr lang="ru-RU" b="1" dirty="0">
+              <a:solidFill>
+                <a:schemeClr val="tx2">
+                  <a:lumMod val="75000"/>
+                </a:schemeClr>
+              </a:solidFill>
+              <a:latin typeface="+mn-lt"/>
+            </a:endParaRPr>
           </a:p>
           <a:p>
             <a:pPr>
@@ -8021,51 +8588,6 @@
                 </a:schemeClr>
               </a:solidFill>
               <a:latin typeface="+mn-lt"/>
-            </a:endParaRPr>
-          </a:p>
-        </p:txBody>
-      </p:sp>
-      <p:sp>
-        <p:nvSpPr>
-          <p:cNvPr id="5" name="Прямоугольник 4"/>
-          <p:cNvSpPr/>
-          <p:nvPr/>
-        </p:nvSpPr>
-        <p:spPr>
-          <a:xfrm>
-            <a:off x="0" y="188640"/>
-            <a:ext cx="9462539" cy="430887"/>
-          </a:xfrm>
-          <a:prstGeom prst="rect">
-            <a:avLst/>
-          </a:prstGeom>
-        </p:spPr>
-        <p:txBody>
-          <a:bodyPr wrap="square">
-            <a:spAutoFit/>
-          </a:bodyPr>
-          <a:lstStyle/>
-          <a:p>
-            <a:pPr lvl="0" eaLnBrk="0" hangingPunct="0">
-              <a:lnSpc>
-                <a:spcPct val="110000"/>
-              </a:lnSpc>
-              <a:defRPr/>
-            </a:pPr>
-            <a:r>
-              <a:rPr lang="ru-RU" sz="2000" b="1" cap="all" dirty="0" smtClean="0">
-                <a:solidFill>
-                  <a:prstClr val="white"/>
-                </a:solidFill>
-                <a:latin typeface="Arial Narrow"/>
-              </a:rPr>
-              <a:t>ПЛАНИРУЕМОЕ ВЗАИМОДЕЙСТВИЕ ДЛЯ РАЗРАБОТКИ РЭ, БУ М500</a:t>
-            </a:r>
-            <a:endParaRPr lang="en-US" sz="2000" b="1" cap="all" dirty="0">
-              <a:solidFill>
-                <a:prstClr val="white"/>
-              </a:solidFill>
-              <a:latin typeface="Arial Narrow"/>
             </a:endParaRPr>
           </a:p>
         </p:txBody>
@@ -8085,326 +8607,6 @@
 </file>
 
 <file path=ppt/slides/slide16.xml><?xml version="1.0" encoding="utf-8"?>
-<p:sld xmlns:a="http://schemas.openxmlformats.org/drawingml/2006/main" xmlns:r="http://schemas.openxmlformats.org/officeDocument/2006/relationships" xmlns:p="http://schemas.openxmlformats.org/presentationml/2006/main">
-  <p:cSld>
-    <p:spTree>
-      <p:nvGrpSpPr>
-        <p:cNvPr id="1" name=""/>
-        <p:cNvGrpSpPr/>
-        <p:nvPr/>
-      </p:nvGrpSpPr>
-      <p:grpSpPr>
-        <a:xfrm>
-          <a:off x="0" y="0"/>
-          <a:ext cx="0" cy="0"/>
-          <a:chOff x="0" y="0"/>
-          <a:chExt cx="0" cy="0"/>
-        </a:xfrm>
-      </p:grpSpPr>
-      <p:sp>
-        <p:nvSpPr>
-          <p:cNvPr id="3" name="TextBox 2"/>
-          <p:cNvSpPr txBox="1"/>
-          <p:nvPr/>
-        </p:nvSpPr>
-        <p:spPr>
-          <a:xfrm>
-            <a:off x="191344" y="764704"/>
-            <a:ext cx="11809312" cy="575799"/>
-          </a:xfrm>
-          <a:prstGeom prst="rect">
-            <a:avLst/>
-          </a:prstGeom>
-          <a:noFill/>
-        </p:spPr>
-        <p:txBody>
-          <a:bodyPr wrap="square" rtlCol="0">
-            <a:spAutoFit/>
-          </a:bodyPr>
-          <a:lstStyle/>
-          <a:p>
-            <a:pPr algn="ctr">
-              <a:lnSpc>
-                <a:spcPct val="150000"/>
-              </a:lnSpc>
-            </a:pPr>
-            <a:r>
-              <a:rPr lang="ru-RU" sz="2400" b="1" u="sng" dirty="0" smtClean="0">
-                <a:solidFill>
-                  <a:schemeClr val="tx2">
-                    <a:lumMod val="75000"/>
-                  </a:schemeClr>
-                </a:solidFill>
-                <a:latin typeface="+mn-lt"/>
-              </a:rPr>
-              <a:t>Концепция представления устройства </a:t>
-            </a:r>
-            <a:r>
-              <a:rPr lang="en-US" sz="2400" b="1" u="sng" dirty="0" smtClean="0">
-                <a:solidFill>
-                  <a:schemeClr val="tx2">
-                    <a:lumMod val="75000"/>
-                  </a:schemeClr>
-                </a:solidFill>
-                <a:latin typeface="+mn-lt"/>
-              </a:rPr>
-              <a:t> </a:t>
-            </a:r>
-            <a:endParaRPr lang="ru-RU" sz="2400" b="1" u="sng" dirty="0" smtClean="0">
-              <a:solidFill>
-                <a:schemeClr val="tx2">
-                  <a:lumMod val="75000"/>
-                </a:schemeClr>
-              </a:solidFill>
-              <a:latin typeface="+mn-lt"/>
-            </a:endParaRPr>
-          </a:p>
-        </p:txBody>
-      </p:sp>
-      <p:sp>
-        <p:nvSpPr>
-          <p:cNvPr id="4" name="TextBox 3"/>
-          <p:cNvSpPr txBox="1"/>
-          <p:nvPr/>
-        </p:nvSpPr>
-        <p:spPr>
-          <a:xfrm>
-            <a:off x="911424" y="3140968"/>
-            <a:ext cx="11017224" cy="3570208"/>
-          </a:xfrm>
-          <a:prstGeom prst="rect">
-            <a:avLst/>
-          </a:prstGeom>
-          <a:noFill/>
-        </p:spPr>
-        <p:txBody>
-          <a:bodyPr wrap="square" rtlCol="0">
-            <a:spAutoFit/>
-          </a:bodyPr>
-          <a:lstStyle/>
-          <a:p>
-            <a:pPr>
-              <a:spcAft>
-                <a:spcPts val="600"/>
-              </a:spcAft>
-            </a:pPr>
-            <a:r>
-              <a:rPr lang="ru-RU" b="1" dirty="0" smtClean="0">
-                <a:solidFill>
-                  <a:schemeClr val="tx2">
-                    <a:lumMod val="75000"/>
-                  </a:schemeClr>
-                </a:solidFill>
-                <a:latin typeface="+mn-lt"/>
-              </a:rPr>
-              <a:t>Код заказа – формирование отчета по </a:t>
-            </a:r>
-            <a:r>
-              <a:rPr lang="ru-RU" b="1" dirty="0" smtClean="0">
-                <a:solidFill>
-                  <a:schemeClr val="tx2">
-                    <a:lumMod val="75000"/>
-                  </a:schemeClr>
-                </a:solidFill>
-                <a:latin typeface="+mn-lt"/>
-              </a:rPr>
-              <a:t>железу</a:t>
-            </a:r>
-          </a:p>
-          <a:p>
-            <a:pPr>
-              <a:spcAft>
-                <a:spcPts val="600"/>
-              </a:spcAft>
-            </a:pPr>
-            <a:endParaRPr lang="ru-RU" b="1" dirty="0">
-              <a:solidFill>
-                <a:schemeClr val="tx2">
-                  <a:lumMod val="75000"/>
-                </a:schemeClr>
-              </a:solidFill>
-              <a:latin typeface="+mn-lt"/>
-            </a:endParaRPr>
-          </a:p>
-          <a:p>
-            <a:r>
-              <a:rPr lang="ru-RU" dirty="0"/>
-              <a:t>Для представления устройства в виде бланка уставок и руководства по эксплуатации необходимы следующие данные </a:t>
-            </a:r>
-            <a:r>
-              <a:rPr lang="en-US" dirty="0"/>
-              <a:t>: </a:t>
-            </a:r>
-          </a:p>
-          <a:p>
-            <a:r>
-              <a:rPr lang="en-US" dirty="0"/>
-              <a:t>1. </a:t>
-            </a:r>
-            <a:r>
-              <a:rPr lang="ru-RU" dirty="0"/>
-              <a:t>Железо устройства (</a:t>
-            </a:r>
-            <a:r>
-              <a:rPr lang="en-US" dirty="0"/>
-              <a:t>Hardware)</a:t>
-            </a:r>
-          </a:p>
-          <a:p>
-            <a:r>
-              <a:rPr lang="en-US" dirty="0"/>
-              <a:t>2. </a:t>
-            </a:r>
-            <a:r>
-              <a:rPr lang="ru-RU" dirty="0"/>
-              <a:t>Софт устройства (</a:t>
-            </a:r>
-            <a:r>
-              <a:rPr lang="en-US" dirty="0"/>
-              <a:t>Software</a:t>
-            </a:r>
-            <a:r>
-              <a:rPr lang="ru-RU" dirty="0"/>
-              <a:t>)</a:t>
-            </a:r>
-            <a:endParaRPr lang="en-US" dirty="0"/>
-          </a:p>
-          <a:p>
-            <a:pPr marL="0" indent="0">
-              <a:buNone/>
-            </a:pPr>
-            <a:r>
-              <a:rPr lang="en-US" dirty="0"/>
-              <a:t>3. </a:t>
-            </a:r>
-            <a:r>
-              <a:rPr lang="ru-RU" dirty="0"/>
-              <a:t>Прочие (</a:t>
-            </a:r>
-            <a:r>
-              <a:rPr lang="en-US" dirty="0"/>
-              <a:t>?</a:t>
-            </a:r>
-            <a:r>
-              <a:rPr lang="ru-RU" dirty="0" smtClean="0"/>
-              <a:t>) </a:t>
-            </a:r>
-            <a:r>
-              <a:rPr lang="ru-RU" dirty="0"/>
-              <a:t>МП устройство РЗА может быть представлено как из двух частей </a:t>
-            </a:r>
-          </a:p>
-          <a:p>
-            <a:pPr marL="0" indent="0">
-              <a:buNone/>
-            </a:pPr>
-            <a:r>
-              <a:rPr lang="ru-RU" dirty="0"/>
-              <a:t>Аппаратная часть (железо) и Программная часть Софт,</a:t>
-            </a:r>
-          </a:p>
-          <a:p>
-            <a:pPr marL="0" indent="0">
-              <a:buNone/>
-            </a:pPr>
-            <a:endParaRPr lang="ru-RU" dirty="0"/>
-          </a:p>
-          <a:p>
-            <a:pPr marL="0" indent="0">
-              <a:buNone/>
-            </a:pPr>
-            <a:r>
-              <a:rPr lang="ru-RU" dirty="0"/>
-              <a:t>Софт включает в себя описание функций РЗА, сервисных функций, </a:t>
-            </a:r>
-          </a:p>
-          <a:p>
-            <a:pPr marL="0" indent="0">
-              <a:buNone/>
-            </a:pPr>
-            <a:r>
-              <a:rPr lang="ru-RU" dirty="0"/>
-              <a:t> при этом конфигурация железа и софта может быть определена по коду заказа</a:t>
-            </a:r>
-            <a:endParaRPr lang="en-US" dirty="0"/>
-          </a:p>
-          <a:p>
-            <a:pPr>
-              <a:spcAft>
-                <a:spcPts val="600"/>
-              </a:spcAft>
-            </a:pPr>
-            <a:endParaRPr lang="ru-RU" b="1" dirty="0" smtClean="0">
-              <a:solidFill>
-                <a:schemeClr val="tx2">
-                  <a:lumMod val="75000"/>
-                </a:schemeClr>
-              </a:solidFill>
-              <a:latin typeface="+mn-lt"/>
-            </a:endParaRPr>
-          </a:p>
-        </p:txBody>
-      </p:sp>
-      <p:sp>
-        <p:nvSpPr>
-          <p:cNvPr id="5" name="Прямоугольник 4"/>
-          <p:cNvSpPr/>
-          <p:nvPr/>
-        </p:nvSpPr>
-        <p:spPr>
-          <a:xfrm>
-            <a:off x="0" y="188640"/>
-            <a:ext cx="9462539" cy="402931"/>
-          </a:xfrm>
-          <a:prstGeom prst="rect">
-            <a:avLst/>
-          </a:prstGeom>
-        </p:spPr>
-        <p:txBody>
-          <a:bodyPr wrap="square">
-            <a:spAutoFit/>
-          </a:bodyPr>
-          <a:lstStyle/>
-          <a:p>
-            <a:pPr lvl="0" eaLnBrk="0" hangingPunct="0">
-              <a:lnSpc>
-                <a:spcPct val="110000"/>
-              </a:lnSpc>
-              <a:defRPr/>
-            </a:pPr>
-            <a:r>
-              <a:rPr lang="ru-RU" sz="2000" b="1" cap="all" dirty="0" smtClean="0">
-                <a:solidFill>
-                  <a:prstClr val="white"/>
-                </a:solidFill>
-                <a:latin typeface="Arial Narrow"/>
-              </a:rPr>
-              <a:t>ПРЕДЛАГАЕМАЯ КОНЦЕПЦИЯ МОДЕЛИ УСТРОЙСТВА </a:t>
-            </a:r>
-            <a:endParaRPr lang="en-US" sz="2000" b="1" cap="all" dirty="0">
-              <a:solidFill>
-                <a:prstClr val="white"/>
-              </a:solidFill>
-              <a:latin typeface="Arial Narrow"/>
-            </a:endParaRPr>
-          </a:p>
-        </p:txBody>
-      </p:sp>
-    </p:spTree>
-    <p:extLst>
-      <p:ext uri="{BB962C8B-B14F-4D97-AF65-F5344CB8AC3E}">
-        <p14:creationId xmlns:p14="http://schemas.microsoft.com/office/powerpoint/2010/main" val="1256622520"/>
-      </p:ext>
-    </p:extLst>
-  </p:cSld>
-  <p:clrMapOvr>
-    <a:masterClrMapping/>
-  </p:clrMapOvr>
-  <p:transition/>
-</p:sld>
-</file>
-
-<file path=ppt/slides/slide17.xml><?xml version="1.0" encoding="utf-8"?>
 <p:sld xmlns:a="http://schemas.openxmlformats.org/drawingml/2006/main" xmlns:r="http://schemas.openxmlformats.org/officeDocument/2006/relationships" xmlns:p="http://schemas.openxmlformats.org/presentationml/2006/main">
   <p:cSld>
     <p:spTree>
@@ -13661,7 +13863,7 @@
         <p:spPr>
           <a:xfrm>
             <a:off x="191344" y="980728"/>
-            <a:ext cx="11809312" cy="2616101"/>
+            <a:ext cx="11809312" cy="2970044"/>
           </a:xfrm>
           <a:prstGeom prst="rect">
             <a:avLst/>
@@ -13778,8 +13980,46 @@
                 </a:solidFill>
                 <a:latin typeface="+mn-lt"/>
               </a:rPr>
-              <a:t>Масштабируемость.</a:t>
-            </a:r>
+              <a:t>Масштабируемость</a:t>
+            </a:r>
+            <a:r>
+              <a:rPr lang="ru-RU" b="1" dirty="0" smtClean="0">
+                <a:solidFill>
+                  <a:schemeClr val="tx2">
+                    <a:lumMod val="75000"/>
+                  </a:schemeClr>
+                </a:solidFill>
+                <a:latin typeface="+mn-lt"/>
+              </a:rPr>
+              <a:t>.</a:t>
+            </a:r>
+          </a:p>
+          <a:p>
+            <a:pPr marL="342900" indent="-342900">
+              <a:spcAft>
+                <a:spcPts val="600"/>
+              </a:spcAft>
+              <a:buAutoNum type="arabicPeriod"/>
+            </a:pPr>
+            <a:r>
+              <a:rPr lang="ru-RU" b="1" dirty="0" smtClean="0">
+                <a:solidFill>
+                  <a:schemeClr val="tx2">
+                    <a:lumMod val="75000"/>
+                  </a:schemeClr>
+                </a:solidFill>
+                <a:latin typeface="+mn-lt"/>
+              </a:rPr>
+              <a:t>Применение открытых бесплатных библиотек.</a:t>
+            </a:r>
+            <a:endParaRPr lang="ru-RU" b="1" dirty="0" smtClean="0">
+              <a:solidFill>
+                <a:schemeClr val="tx2">
+                  <a:lumMod val="75000"/>
+                </a:schemeClr>
+              </a:solidFill>
+              <a:latin typeface="+mn-lt"/>
+            </a:endParaRPr>
           </a:p>
           <a:p>
             <a:pPr>
@@ -14809,7 +15049,18 @@
                 </a:solidFill>
                 <a:latin typeface="+mn-lt"/>
               </a:rPr>
-              <a:t>, добавляет дополнительные возможности для улучшения внешнего вида эксплуатационной документации. Например, возможность форматирования вывода чисел в бланках уставок и таблицах РЭ. То есть, выводить количество нулей в диапазонах уставок именно таким, каким задан шаг для конкретной уставки.</a:t>
+              <a:t> </a:t>
+            </a:r>
+            <a:r>
+              <a:rPr lang="ru-RU" sz="2000" b="1" dirty="0" smtClean="0">
+                <a:solidFill>
+                  <a:schemeClr val="tx2">
+                    <a:lumMod val="75000"/>
+                  </a:schemeClr>
+                </a:solidFill>
+                <a:latin typeface="+mn-lt"/>
+              </a:rPr>
+              <a:t>добавляет дополнительные возможности для улучшения внешнего вида эксплуатационной документации. Например, возможность форматирования вывода чисел в бланках уставок и таблицах РЭ. То есть, выводить количество нулей в диапазонах уставок именно таким, каким задан шаг для конкретной уставки.</a:t>
             </a:r>
           </a:p>
           <a:p>

--- a/Презентация/Презентация.pptx
+++ b/Презентация/Презентация.pptx
@@ -8088,18 +8088,7 @@
                 </a:solidFill>
                 <a:latin typeface="+mn-lt"/>
               </a:rPr>
-              <a:t>Для описания устройства достаточно собрать объект классов </a:t>
-            </a:r>
-            <a:r>
-              <a:rPr lang="ru-RU" b="1" dirty="0" smtClean="0">
-                <a:solidFill>
-                  <a:schemeClr val="tx2">
-                    <a:lumMod val="75000"/>
-                  </a:schemeClr>
-                </a:solidFill>
-                <a:latin typeface="+mn-lt"/>
-              </a:rPr>
-              <a:t>Аппаратная часть и Программная часть.</a:t>
+              <a:t>Для описания устройства достаточно собрать объект классов Аппаратная часть и Программная часть.</a:t>
             </a:r>
           </a:p>
           <a:p>
@@ -8179,18 +8168,7 @@
                 </a:solidFill>
                 <a:latin typeface="+mn-lt"/>
               </a:rPr>
-              <a:t>Например</a:t>
-            </a:r>
-            <a:r>
-              <a:rPr lang="ru-RU" b="1" dirty="0">
-                <a:solidFill>
-                  <a:schemeClr val="tx2">
-                    <a:lumMod val="75000"/>
-                  </a:schemeClr>
-                </a:solidFill>
-                <a:latin typeface="+mn-lt"/>
-              </a:rPr>
-              <a:t>, вида</a:t>
+              <a:t>Например, вида</a:t>
             </a:r>
             <a:r>
               <a:rPr lang="en-US" b="1" dirty="0">
@@ -9541,7 +9519,40 @@
                 </a:solidFill>
                 <a:latin typeface="+mn-lt"/>
               </a:rPr>
-              <a:t>	Ручное сопровождение таких данных и формирование на их основе бланков уставок и руководств по эксплуатации процесс ресурсоемкий, подвержен человеческим ошибкам и все это затрудняет актуализацию при внесении каких-либо изменений в описание функций и пр.</a:t>
+              <a:t>	Ручное сопровождение таких данных и формирование на их основе бланков уставок и руководств по эксплуатации процесс ресурсоемкий</a:t>
+            </a:r>
+            <a:r>
+              <a:rPr lang="ru-RU" b="1" smtClean="0">
+                <a:solidFill>
+                  <a:schemeClr val="tx2">
+                    <a:lumMod val="75000"/>
+                  </a:schemeClr>
+                </a:solidFill>
+                <a:latin typeface="+mn-lt"/>
+              </a:rPr>
+              <a:t>, </a:t>
+            </a:r>
+            <a:r>
+              <a:rPr lang="ru-RU" b="1" smtClean="0">
+                <a:solidFill>
+                  <a:schemeClr val="tx2">
+                    <a:lumMod val="75000"/>
+                  </a:schemeClr>
+                </a:solidFill>
+                <a:latin typeface="+mn-lt"/>
+              </a:rPr>
+              <a:t>подвержено </a:t>
+            </a:r>
+            <a:r>
+              <a:rPr lang="ru-RU" b="1" dirty="0" smtClean="0">
+                <a:solidFill>
+                  <a:schemeClr val="tx2">
+                    <a:lumMod val="75000"/>
+                  </a:schemeClr>
+                </a:solidFill>
+                <a:latin typeface="+mn-lt"/>
+              </a:rPr>
+              <a:t>человеческим ошибкам и все это затрудняет актуализацию при внесении каких-либо изменений в описание функций и пр.</a:t>
             </a:r>
           </a:p>
           <a:p>
@@ -13980,18 +13991,7 @@
                 </a:solidFill>
                 <a:latin typeface="+mn-lt"/>
               </a:rPr>
-              <a:t>Масштабируемость</a:t>
-            </a:r>
-            <a:r>
-              <a:rPr lang="ru-RU" b="1" dirty="0" smtClean="0">
-                <a:solidFill>
-                  <a:schemeClr val="tx2">
-                    <a:lumMod val="75000"/>
-                  </a:schemeClr>
-                </a:solidFill>
-                <a:latin typeface="+mn-lt"/>
-              </a:rPr>
-              <a:t>.</a:t>
+              <a:t>Масштабируемость.</a:t>
             </a:r>
           </a:p>
           <a:p>
@@ -14012,14 +14012,6 @@
               </a:rPr>
               <a:t>Применение открытых бесплатных библиотек.</a:t>
             </a:r>
-            <a:endParaRPr lang="ru-RU" b="1" dirty="0" smtClean="0">
-              <a:solidFill>
-                <a:schemeClr val="tx2">
-                  <a:lumMod val="75000"/>
-                </a:schemeClr>
-              </a:solidFill>
-              <a:latin typeface="+mn-lt"/>
-            </a:endParaRPr>
           </a:p>
           <a:p>
             <a:pPr>
@@ -15049,18 +15041,7 @@
                 </a:solidFill>
                 <a:latin typeface="+mn-lt"/>
               </a:rPr>
-              <a:t> </a:t>
-            </a:r>
-            <a:r>
-              <a:rPr lang="ru-RU" sz="2000" b="1" dirty="0" smtClean="0">
-                <a:solidFill>
-                  <a:schemeClr val="tx2">
-                    <a:lumMod val="75000"/>
-                  </a:schemeClr>
-                </a:solidFill>
-                <a:latin typeface="+mn-lt"/>
-              </a:rPr>
-              <a:t>добавляет дополнительные возможности для улучшения внешнего вида эксплуатационной документации. Например, возможность форматирования вывода чисел в бланках уставок и таблицах РЭ. То есть, выводить количество нулей в диапазонах уставок именно таким, каким задан шаг для конкретной уставки.</a:t>
+              <a:t> добавляет дополнительные возможности для улучшения внешнего вида эксплуатационной документации. Например, возможность форматирования вывода чисел в бланках уставок и таблицах РЭ. То есть, выводить количество нулей в диапазонах уставок именно таким, каким задан шаг для конкретной уставки.</a:t>
             </a:r>
           </a:p>
           <a:p>
